--- a/labs/lab02/slides/slides.pptx
+++ b/labs/lab02/slides/slides.pptx
@@ -1132,7 +1132,7 @@
             </a:pPr>
             <a:r>
               <a:rPr/>
-              <a:t>Discrete quantitative variables are countable or recorded in fixed steps; continuous variables can take any value within a meaningful interval. Classification depends on how values are recorded.</a:t>
+              <a:t>Use the worksheet’s examples and answer key for this classification exercise. Give one classification for each quantitative variable. Counts and summed scores are discrete; Clark’s height, the height difference, and averaged scores are continuous in this worksheet.</a:t>
             </a:r>
           </a:p>
         </p:txBody>
@@ -1378,7 +1378,7 @@
             </a:pPr>
             <a:r>
               <a:rPr/>
-              <a:t>Have students decide first whether each variable records a category or an amount. For quantitative variables, decide whether the recorded values are discrete or continuous.</a:t>
+              <a:t>Have students decide first whether each variable describes a category or an amount. For each quantitative variable, choose discrete or continuous using the worksheet description.</a:t>
             </a:r>
           </a:p>
         </p:txBody>
@@ -1640,7 +1640,7 @@
             </a:r>
             <a:r>
               <a:rPr/>
-              <a:t> records a year in fixed one-year units, so classify it as quantitative and discrete as recorded. State the recording rule with the answer.</a:t>
+              <a:t> records a calendar year. Classify it as quantitative and discrete, as shown in the worksheet key.</a:t>
             </a:r>
           </a:p>
         </p:txBody>
@@ -1722,7 +1722,7 @@
             </a:pPr>
             <a:r>
               <a:rPr/>
-              <a:t>Actor height represents an amount and can vary within a meaningful interval. Even if rounded for display, the underlying construct is quantitative and continuous.</a:t>
+              <a:t>Use the worksheet classification: Clark’s height in meters is quantitative and continuous.</a:t>
             </a:r>
           </a:p>
         </p:txBody>
@@ -1892,7 +1892,7 @@
             </a:pPr>
             <a:r>
               <a:rPr/>
-              <a:t>Classify Lois’s height from its measurement rule, not from the character label. It is a quantitative, continuous measure recorded in feet.</a:t>
+              <a:t>The worksheet records Lois’s height in inches, rounded up to whole numbers. Classify it as quantitative and discrete.</a:t>
             </a:r>
           </a:p>
         </p:txBody>
@@ -1973,14 +1973,8 @@
               <a:buNone/>
             </a:pPr>
             <a:r>
-              <a:rPr>
-                <a:latin typeface="Courier"/>
-              </a:rPr>
-              <a:t>height_diff</a:t>
-            </a:r>
-            <a:r>
-              <a:rPr/>
-              <a:t> subtracts two continuous measurements and preserves meaningful size and direction. Explain what positive, negative, and zero values would mean.</a:t>
+              <a:rPr/>
+              <a:t>The worksheet classifies the height difference in feet as quantitative and continuous. Ask what positive, negative, and zero values mean.</a:t>
             </a:r>
           </a:p>
         </p:txBody>
@@ -2472,7 +2466,7 @@
             </a:pPr>
             <a:r>
               <a:rPr/>
-              <a:t>Contrast the critics score with status. A 0–100 score is quantitative and discrete as recorded; Fresh or Rotten is qualitative even when stored as a code.</a:t>
+              <a:t>Use the worksheet key: the critics score is quantitative and discrete; Fresh or Rotten is qualitative even when stored as a code.</a:t>
             </a:r>
           </a:p>
         </p:txBody>
@@ -2554,7 +2548,7 @@
             </a:pPr>
             <a:r>
               <a:rPr/>
-              <a:t>Audience score is recorded as a whole-number percentage. Classify it as quantitative and discrete as recorded, then distinguish it from an individual’s rating.</a:t>
+              <a:t>The worksheet classifies the audience score as quantitative and discrete. Distinguish this score from an individual’s rating.</a:t>
             </a:r>
           </a:p>
         </p:txBody>
@@ -2636,7 +2630,7 @@
             </a:pPr>
             <a:r>
               <a:rPr/>
-              <a:t>Average stars can take decimal values within the one-to-five interval, so treat the recorded variable as quantitative and continuous.</a:t>
+              <a:t>The worksheet classifies the average star rating as quantitative and continuous. Keep this classification consistent with the averaged cognitive engagement score.</a:t>
             </a:r>
           </a:p>
         </p:txBody>
@@ -2800,7 +2794,7 @@
             </a:pPr>
             <a:r>
               <a:rPr/>
-              <a:t>Metacritic’s weighted score is stored as a whole number from 0 to 100. The weighting process does not change its discrete recorded values.</a:t>
+              <a:t>Use the worksheet classification: the Metacritic score is quantitative and discrete.</a:t>
             </a:r>
           </a:p>
         </p:txBody>
@@ -3046,7 +3040,37 @@
             </a:pPr>
             <a:r>
               <a:rPr/>
-              <a:t>Compare summed integer subscales with an averaged subscale that can produce decimals. All are quantitative, but the recorded scoring rule affects discrete versus continuous classification.</a:t>
+              <a:t>All three subscales are quantitative. The worksheet classifies the summed scores, </a:t>
+            </a:r>
+            <a:r>
+              <a:rPr>
+                <a:latin typeface="Courier"/>
+              </a:rPr>
+              <a:t>emo</a:t>
+            </a:r>
+            <a:r>
+              <a:rPr/>
+              <a:t> and </a:t>
+            </a:r>
+            <a:r>
+              <a:rPr>
+                <a:latin typeface="Courier"/>
+              </a:rPr>
+              <a:t>aes</a:t>
+            </a:r>
+            <a:r>
+              <a:rPr/>
+              <a:t>, as discrete and the averaged score, </a:t>
+            </a:r>
+            <a:r>
+              <a:rPr>
+                <a:latin typeface="Courier"/>
+              </a:rPr>
+              <a:t>cog</a:t>
+            </a:r>
+            <a:r>
+              <a:rPr/>
+              <a:t>, as continuous. Ask students to identify which scores are summed and which is averaged.</a:t>
             </a:r>
           </a:p>
         </p:txBody>
@@ -3128,7 +3152,7 @@
             </a:pPr>
             <a:r>
               <a:rPr/>
-              <a:t>Pause for terminology and classification questions before the partner activity. Ask students to explain any disputed answer from its recording rule.</a:t>
+              <a:t>Pause for terminology and classification questions before the partner activity. Use the worksheet descriptions and key to clarify answers.</a:t>
             </a:r>
           </a:p>
         </p:txBody>
@@ -3210,7 +3234,7 @@
             </a:pPr>
             <a:r>
               <a:rPr/>
-              <a:t>Pair students and direct them to Part 2 of the worksheet. Each answer should name the construct, operation, and variable type in ordinary language.</a:t>
+              <a:t>Pair students and direct them to the In-Class section of the worksheet. Follow Parts A, B, and C in order.</a:t>
             </a:r>
           </a:p>
         </p:txBody>
@@ -3538,7 +3562,7 @@
             </a:pPr>
             <a:r>
               <a:rPr/>
-              <a:t>Use the same sequence for every question: identify constructs, name predictor and outcome, define operations, and classify the recorded variables.</a:t>
+              <a:t>Follow the worksheet sequence: identify the target population, name the independent and dependent variables, define their operations, and classify each variable.</a:t>
             </a:r>
           </a:p>
         </p:txBody>
@@ -5485,8 +5509,8 @@
         </p:nvSpPr>
         <p:spPr>
           <a:xfrm>
-            <a:off x="1583436" y="2313433"/>
-            <a:ext cx="4270248" cy="704087"/>
+            <a:off x="1097280" y="2313433"/>
+            <a:ext cx="4907280" cy="548640"/>
           </a:xfrm>
         </p:spPr>
         <p:txBody>
@@ -5558,8 +5582,8 @@
         </p:nvSpPr>
         <p:spPr>
           <a:xfrm>
-            <a:off x="1583436" y="3143250"/>
-            <a:ext cx="4270248" cy="2596776"/>
+            <a:off x="1097280" y="2926080"/>
+            <a:ext cx="4907280" cy="3177540"/>
           </a:xfrm>
         </p:spPr>
         <p:txBody>
@@ -5615,8 +5639,8 @@
         </p:nvSpPr>
         <p:spPr>
           <a:xfrm>
-            <a:off x="6338316" y="3143250"/>
-            <a:ext cx="4253484" cy="2596776"/>
+            <a:off x="6187440" y="2926080"/>
+            <a:ext cx="4907280" cy="3177540"/>
           </a:xfrm>
         </p:spPr>
         <p:txBody>
@@ -5676,8 +5700,8 @@
         </p:nvSpPr>
         <p:spPr>
           <a:xfrm>
-            <a:off x="6338316" y="2313433"/>
-            <a:ext cx="4270248" cy="704087"/>
+            <a:off x="6187440" y="2313433"/>
+            <a:ext cx="4907280" cy="548640"/>
           </a:xfrm>
         </p:spPr>
         <p:txBody>
@@ -5812,7 +5836,12 @@
             <p:ph type="title"/>
           </p:nvPr>
         </p:nvSpPr>
-        <p:spPr/>
+        <p:spPr>
+          <a:xfrm>
+            <a:off x="1097280" y="964692"/>
+            <a:ext cx="9997440" cy="1188720"/>
+          </a:xfrm>
+        </p:spPr>
         <p:txBody>
           <a:bodyPr/>
           <a:lstStyle/>
@@ -7524,7 +7553,7 @@
           </a:ln>
         </p:spPr>
         <p:txBody>
-          <a:bodyPr lIns="182880" tIns="182880" rIns="182880" bIns="182880" anchor="t" wrap="square">
+          <a:bodyPr lIns="182880" tIns="0" rIns="182880" bIns="0" anchor="t" wrap="square">
             <a:normAutofit/>
           </a:bodyPr>
           <a:lstStyle/>
@@ -7563,7 +7592,7 @@
           </a:ln>
         </p:spPr>
         <p:txBody>
-          <a:bodyPr lIns="182880" tIns="182880" rIns="182880" bIns="182880" anchor="t" wrap="square">
+          <a:bodyPr lIns="182880" tIns="0" rIns="182880" bIns="0" anchor="t" wrap="square">
             <a:normAutofit/>
           </a:bodyPr>
           <a:lstStyle/>
@@ -7803,7 +7832,13 @@
       </p:sp>
       <p:sp>
         <p:nvSpPr>
-          <p:cNvPr id="1012" name="card-rail" descr=""/>
+          <p:cNvPr id="1012" name="card-rail" descr="">
+            <a:extLst>
+              <a:ext uri="{C183D7F6-B498-43B3-948B-1728B52AA6E4}">
+                <adec:decorative xmlns:adec="http://schemas.microsoft.com/office/drawing/2017/decorative" val="1"/>
+              </a:ext>
+            </a:extLst>
+          </p:cNvPr>
           <p:cNvSpPr/>
           <p:nvPr/>
         </p:nvSpPr>
@@ -7888,7 +7923,13 @@
       </p:sp>
       <p:sp>
         <p:nvSpPr>
-          <p:cNvPr id="1014" name="card-rail" descr=""/>
+          <p:cNvPr id="1014" name="card-rail" descr="">
+            <a:extLst>
+              <a:ext uri="{C183D7F6-B498-43B3-948B-1728B52AA6E4}">
+                <adec:decorative xmlns:adec="http://schemas.microsoft.com/office/drawing/2017/decorative" val="1"/>
+              </a:ext>
+            </a:extLst>
+          </p:cNvPr>
           <p:cNvSpPr/>
           <p:nvPr/>
         </p:nvSpPr>
@@ -7991,7 +8032,7 @@
           </a:ln>
         </p:spPr>
         <p:txBody>
-          <a:bodyPr lIns="182880" tIns="182880" rIns="182880" bIns="182880" anchor="t" wrap="square">
+          <a:bodyPr lIns="182880" tIns="0" rIns="182880" bIns="0" anchor="t" wrap="square">
             <a:normAutofit/>
           </a:bodyPr>
           <a:lstStyle/>
@@ -8030,7 +8071,7 @@
           </a:ln>
         </p:spPr>
         <p:txBody>
-          <a:bodyPr lIns="182880" tIns="182880" rIns="182880" bIns="182880" anchor="t" wrap="square">
+          <a:bodyPr lIns="182880" tIns="0" rIns="182880" bIns="0" anchor="t" wrap="square">
             <a:normAutofit/>
           </a:bodyPr>
           <a:lstStyle/>
@@ -8236,7 +8277,7 @@
           </a:ln>
         </p:spPr>
         <p:txBody>
-          <a:bodyPr lIns="182880" tIns="182880" rIns="182880" bIns="182880" anchor="t" wrap="square">
+          <a:bodyPr lIns="182880" tIns="0" rIns="182880" bIns="0" anchor="t" wrap="square">
             <a:normAutofit/>
           </a:bodyPr>
           <a:lstStyle/>
@@ -8275,7 +8316,7 @@
           </a:ln>
         </p:spPr>
         <p:txBody>
-          <a:bodyPr lIns="182880" tIns="182880" rIns="182880" bIns="182880" anchor="t" wrap="square">
+          <a:bodyPr lIns="182880" tIns="0" rIns="182880" bIns="0" anchor="t" wrap="square">
             <a:normAutofit/>
           </a:bodyPr>
           <a:lstStyle/>
@@ -8586,7 +8627,13 @@
       </p:sp>
       <p:sp>
         <p:nvSpPr>
-          <p:cNvPr id="1026" name="card-rail" descr=""/>
+          <p:cNvPr id="1026" name="card-rail" descr="">
+            <a:extLst>
+              <a:ext uri="{C183D7F6-B498-43B3-948B-1728B52AA6E4}">
+                <adec:decorative xmlns:adec="http://schemas.microsoft.com/office/drawing/2017/decorative" val="1"/>
+              </a:ext>
+            </a:extLst>
+          </p:cNvPr>
           <p:cNvSpPr/>
           <p:nvPr/>
         </p:nvSpPr>
@@ -8682,7 +8729,13 @@
       </p:sp>
       <p:sp>
         <p:nvSpPr>
-          <p:cNvPr id="1028" name="card-rail" descr=""/>
+          <p:cNvPr id="1028" name="card-rail" descr="">
+            <a:extLst>
+              <a:ext uri="{C183D7F6-B498-43B3-948B-1728B52AA6E4}">
+                <adec:decorative xmlns:adec="http://schemas.microsoft.com/office/drawing/2017/decorative" val="1"/>
+              </a:ext>
+            </a:extLst>
+          </p:cNvPr>
           <p:cNvSpPr/>
           <p:nvPr/>
         </p:nvSpPr>
@@ -8713,14 +8766,14 @@
       </p:sp>
       <p:sp>
         <p:nvSpPr>
-          <p:cNvPr id="1029" name="card-steel" descr="card: Then ask. If quantitative, are the recorded values discrete or continuous?"/>
+          <p:cNvPr id="1029" name="card-steel" descr="card: Then ask. If quantitative, is the variable discrete or continuous?"/>
           <p:cNvSpPr/>
           <p:nvPr/>
         </p:nvSpPr>
         <p:spPr>
           <a:xfrm>
             <a:off x="7857744" y="2633472"/>
-            <a:ext cx="3233928" cy="1920240"/>
+            <a:ext cx="3233928" cy="1615440"/>
           </a:xfrm>
           <a:prstGeom prst="roundRect">
             <a:avLst>
@@ -8760,21 +8813,27 @@
                   <a:srgbClr val="010B13"/>
                 </a:solidFill>
               </a:rPr>
-              <a:t>If quantitative, are the recorded values discrete or continuous?</a:t>
-            </a:r>
-          </a:p>
-        </p:txBody>
-      </p:sp>
-      <p:sp>
-        <p:nvSpPr>
-          <p:cNvPr id="1030" name="card-rail" descr=""/>
+              <a:t>If quantitative, is the variable discrete or continuous?</a:t>
+            </a:r>
+          </a:p>
+        </p:txBody>
+      </p:sp>
+      <p:sp>
+        <p:nvSpPr>
+          <p:cNvPr id="1030" name="card-rail" descr="">
+            <a:extLst>
+              <a:ext uri="{C183D7F6-B498-43B3-948B-1728B52AA6E4}">
+                <adec:decorative xmlns:adec="http://schemas.microsoft.com/office/drawing/2017/decorative" val="1"/>
+              </a:ext>
+            </a:extLst>
+          </p:cNvPr>
           <p:cNvSpPr/>
           <p:nvPr/>
         </p:nvSpPr>
         <p:spPr>
           <a:xfrm>
             <a:off x="7857744" y="2633472"/>
-            <a:ext cx="54864" cy="1920240"/>
+            <a:ext cx="54864" cy="1615440"/>
           </a:xfrm>
           <a:prstGeom prst="roundRect">
             <a:avLst>
@@ -9018,21 +9077,21 @@
             </a:pPr>
             <a:r>
               <a:rPr/>
-              <a:t>14 Quantitative Variables</a:t>
-            </a:r>
-          </a:p>
-        </p:txBody>
-      </p:sp>
-      <p:sp>
-        <p:nvSpPr>
-          <p:cNvPr id="1031" name="card-red" descr="card: Discrete. Recorded in separate, countable values. Examples: number of reviews, year first released, a summed 4-item scale score."/>
+              <a:t>14 Quantitative variables in this worksheet</a:t>
+            </a:r>
+          </a:p>
+        </p:txBody>
+      </p:sp>
+      <p:sp>
+        <p:nvSpPr>
+          <p:cNvPr id="1031" name="card-red" descr="card: Discrete. Counts and whole-number scores. Examples: number of reviews, year first released, a summed 4-item scale score."/>
           <p:cNvSpPr/>
           <p:nvPr/>
         </p:nvSpPr>
         <p:spPr>
           <a:xfrm>
             <a:off x="1097280" y="2633472"/>
-            <a:ext cx="4924044" cy="2225040"/>
+            <a:ext cx="4924044" cy="1920240"/>
           </a:xfrm>
           <a:prstGeom prst="roundRect">
             <a:avLst>
@@ -9072,7 +9131,7 @@
                   <a:srgbClr val="010B13"/>
                 </a:solidFill>
               </a:rPr>
-              <a:t>Recorded in separate, countable values.</a:t>
+              <a:t>Counts and whole-number scores.</a:t>
             </a:r>
           </a:p>
           <a:p>
@@ -9090,14 +9149,20 @@
       </p:sp>
       <p:sp>
         <p:nvSpPr>
-          <p:cNvPr id="1032" name="card-rail" descr=""/>
+          <p:cNvPr id="1032" name="card-rail" descr="">
+            <a:extLst>
+              <a:ext uri="{C183D7F6-B498-43B3-948B-1728B52AA6E4}">
+                <adec:decorative xmlns:adec="http://schemas.microsoft.com/office/drawing/2017/decorative" val="1"/>
+              </a:ext>
+            </a:extLst>
+          </p:cNvPr>
           <p:cNvSpPr/>
           <p:nvPr/>
         </p:nvSpPr>
         <p:spPr>
           <a:xfrm>
             <a:off x="1097280" y="2633472"/>
-            <a:ext cx="54864" cy="2225040"/>
+            <a:ext cx="54864" cy="1920240"/>
           </a:xfrm>
           <a:prstGeom prst="roundRect">
             <a:avLst>
@@ -9121,7 +9186,7 @@
       </p:sp>
       <p:sp>
         <p:nvSpPr>
-          <p:cNvPr id="1033" name="card-steel" descr="card: Continuous. Can take any value within a meaningful interval, even when rounded for recording. Examples: height, elapsed time, an average rating."/>
+          <p:cNvPr id="1033" name="card-steel" descr="card: Continuous. Measurements and averaged scores. Examples: Clark’s height, the height difference, an average rating."/>
           <p:cNvSpPr/>
           <p:nvPr/>
         </p:nvSpPr>
@@ -9168,7 +9233,7 @@
                   <a:srgbClr val="010B13"/>
                 </a:solidFill>
               </a:rPr>
-              <a:t>Can take any value within a meaningful interval, even when rounded for recording.</a:t>
+              <a:t>Measurements and averaged scores.</a:t>
             </a:r>
           </a:p>
           <a:p>
@@ -9179,14 +9244,20 @@
                   <a:srgbClr val="010B13"/>
                 </a:solidFill>
               </a:rPr>
-              <a:t>Examples: height, elapsed time, an average rating.</a:t>
-            </a:r>
-          </a:p>
-        </p:txBody>
-      </p:sp>
-      <p:sp>
-        <p:nvSpPr>
-          <p:cNvPr id="1034" name="card-rail" descr=""/>
+              <a:t>Examples: Clark’s height, the height difference, an average rating.</a:t>
+            </a:r>
+          </a:p>
+        </p:txBody>
+      </p:sp>
+      <p:sp>
+        <p:nvSpPr>
+          <p:cNvPr id="1034" name="card-rail" descr="">
+            <a:extLst>
+              <a:ext uri="{C183D7F6-B498-43B3-948B-1728B52AA6E4}">
+                <adec:decorative xmlns:adec="http://schemas.microsoft.com/office/drawing/2017/decorative" val="1"/>
+              </a:ext>
+            </a:extLst>
+          </p:cNvPr>
           <p:cNvSpPr/>
           <p:nvPr/>
         </p:nvSpPr>
@@ -9270,7 +9341,7 @@
             </a:pPr>
             <a:r>
               <a:rPr/>
-              <a:t>Let’s Practice!!</a:t>
+              <a:t>Practice classifying variables</a:t>
             </a:r>
           </a:p>
         </p:txBody>
@@ -9394,7 +9465,13 @@
       </p:sp>
       <p:sp>
         <p:nvSpPr>
-          <p:cNvPr id="1036" name="card-rail" descr=""/>
+          <p:cNvPr id="1036" name="card-rail" descr="">
+            <a:extLst>
+              <a:ext uri="{C183D7F6-B498-43B3-948B-1728B52AA6E4}">
+                <adec:decorative xmlns:adec="http://schemas.microsoft.com/office/drawing/2017/decorative" val="1"/>
+              </a:ext>
+            </a:extLst>
+          </p:cNvPr>
           <p:cNvSpPr/>
           <p:nvPr/>
         </p:nvSpPr>
@@ -9425,7 +9502,7 @@
       </p:sp>
       <p:sp>
         <p:nvSpPr>
-          <p:cNvPr id="1037" name="card-red" descr="card: height_grp. Over 6 feet: yes or no. Preserves only category membership."/>
+          <p:cNvPr id="1037" name="card-red" descr="card: height_grp. 6 feet or taller: yes or no. Preserves only category membership."/>
           <p:cNvSpPr/>
           <p:nvPr/>
         </p:nvSpPr>
@@ -9472,7 +9549,7 @@
                   <a:srgbClr val="010B13"/>
                 </a:solidFill>
               </a:rPr>
-              <a:t>Over 6 feet: yes or no.</a:t>
+              <a:t>6 feet or taller: yes or no.</a:t>
             </a:r>
           </a:p>
           <a:p>
@@ -9490,7 +9567,13 @@
       </p:sp>
       <p:sp>
         <p:nvSpPr>
-          <p:cNvPr id="1038" name="card-rail" descr=""/>
+          <p:cNvPr id="1038" name="card-rail" descr="">
+            <a:extLst>
+              <a:ext uri="{C183D7F6-B498-43B3-948B-1728B52AA6E4}">
+                <adec:decorative xmlns:adec="http://schemas.microsoft.com/office/drawing/2017/decorative" val="1"/>
+              </a:ext>
+            </a:extLst>
+          </p:cNvPr>
           <p:cNvSpPr/>
           <p:nvPr/>
         </p:nvSpPr>
@@ -9586,7 +9669,13 @@
       </p:sp>
       <p:sp>
         <p:nvSpPr>
-          <p:cNvPr id="1040" name="card-rail" descr=""/>
+          <p:cNvPr id="1040" name="card-rail" descr="">
+            <a:extLst>
+              <a:ext uri="{C183D7F6-B498-43B3-948B-1728B52AA6E4}">
+                <adec:decorative xmlns:adec="http://schemas.microsoft.com/office/drawing/2017/decorative" val="1"/>
+              </a:ext>
+            </a:extLst>
+          </p:cNvPr>
           <p:cNvSpPr/>
           <p:nvPr/>
         </p:nvSpPr>
@@ -9716,6 +9805,17 @@
               <a:t>Practice with the Lab 02 worksheet</a:t>
             </a:r>
           </a:p>
+          <a:p>
+            <a:pPr lvl="0" indent="0" marL="0">
+              <a:buNone/>
+            </a:pPr>
+            <a:r>
+              <a:rPr>
+                <a:hlinkClick r:id="rId3"/>
+              </a:rPr>
+              <a:t>Worksheet: lab schedule</a:t>
+            </a:r>
+          </a:p>
         </p:txBody>
       </p:sp>
     </p:spTree>
@@ -10322,7 +10422,7 @@
             </a:pPr>
             <a:r>
               <a:rPr/>
-              <a:t>Values such as </a:t>
+              <a:t>Height in meters to two decimal places, with values such as </a:t>
             </a:r>
             <a:r>
               <a:rPr>
@@ -10342,7 +10442,7 @@
             </a:r>
             <a:r>
               <a:rPr/>
-              <a:t> represent measured height in meters.</a:t>
+              <a:t>.</a:t>
             </a:r>
           </a:p>
           <a:p>
@@ -10484,7 +10584,7 @@
               <a:rPr>
                 <a:latin typeface="Courier"/>
               </a:rPr>
-              <a:t>1 = over 6 feet</a:t>
+              <a:t>1 = 6 feet or taller</a:t>
             </a:r>
             <a:r>
               <a:rPr/>
@@ -10676,7 +10776,7 @@
             </a:pPr>
             <a:r>
               <a:rPr b="1"/>
-              <a:t>Quantitative · discrete as recorded</a:t>
+              <a:t>Quantitative · discrete</a:t>
             </a:r>
           </a:p>
         </p:txBody>
@@ -10923,7 +11023,13 @@
       </p:sp>
       <p:sp>
         <p:nvSpPr>
-          <p:cNvPr id="1042" name="card-rail" descr=""/>
+          <p:cNvPr id="1042" name="card-rail" descr="">
+            <a:extLst>
+              <a:ext uri="{C183D7F6-B498-43B3-948B-1728B52AA6E4}">
+                <adec:decorative xmlns:adec="http://schemas.microsoft.com/office/drawing/2017/decorative" val="1"/>
+              </a:ext>
+            </a:extLst>
+          </p:cNvPr>
           <p:cNvSpPr/>
           <p:nvPr/>
         </p:nvSpPr>
@@ -10954,14 +11060,14 @@
       </p:sp>
       <p:sp>
         <p:nvSpPr>
-          <p:cNvPr id="1043" name="card-steel" descr="card: Grouping. Reducing height to over/under 6 feet discards distance from the threshold."/>
+          <p:cNvPr id="1043" name="card-steel" descr="card: Grouping. Grouping height as 6 feet or taller versus under 6 feet discards distance from the threshold."/>
           <p:cNvSpPr/>
           <p:nvPr/>
         </p:nvSpPr>
         <p:spPr>
           <a:xfrm>
             <a:off x="4477512" y="2633472"/>
-            <a:ext cx="3233928" cy="1920240"/>
+            <a:ext cx="3233928" cy="2225040"/>
           </a:xfrm>
           <a:prstGeom prst="roundRect">
             <a:avLst>
@@ -11001,21 +11107,27 @@
                   <a:srgbClr val="010B13"/>
                 </a:solidFill>
               </a:rPr>
-              <a:t>Reducing height to over/under 6 feet discards distance from the threshold.</a:t>
-            </a:r>
-          </a:p>
-        </p:txBody>
-      </p:sp>
-      <p:sp>
-        <p:nvSpPr>
-          <p:cNvPr id="1044" name="card-rail" descr=""/>
+              <a:t>Grouping height as 6 feet or taller versus under 6 feet discards distance from the threshold.</a:t>
+            </a:r>
+          </a:p>
+        </p:txBody>
+      </p:sp>
+      <p:sp>
+        <p:nvSpPr>
+          <p:cNvPr id="1044" name="card-rail" descr="">
+            <a:extLst>
+              <a:ext uri="{C183D7F6-B498-43B3-948B-1728B52AA6E4}">
+                <adec:decorative xmlns:adec="http://schemas.microsoft.com/office/drawing/2017/decorative" val="1"/>
+              </a:ext>
+            </a:extLst>
+          </p:cNvPr>
           <p:cNvSpPr/>
           <p:nvPr/>
         </p:nvSpPr>
         <p:spPr>
           <a:xfrm>
             <a:off x="4477512" y="2633472"/>
-            <a:ext cx="54864" cy="1920240"/>
+            <a:ext cx="54864" cy="2225040"/>
           </a:xfrm>
           <a:prstGeom prst="roundRect">
             <a:avLst>
@@ -11093,7 +11205,13 @@
       </p:sp>
       <p:sp>
         <p:nvSpPr>
-          <p:cNvPr id="1046" name="card-rail" descr=""/>
+          <p:cNvPr id="1046" name="card-rail" descr="">
+            <a:extLst>
+              <a:ext uri="{C183D7F6-B498-43B3-948B-1728B52AA6E4}">
+                <adec:decorative xmlns:adec="http://schemas.microsoft.com/office/drawing/2017/decorative" val="1"/>
+              </a:ext>
+            </a:extLst>
+          </p:cNvPr>
           <p:cNvSpPr/>
           <p:nvPr/>
         </p:nvSpPr>
@@ -11692,7 +11810,12 @@
             <p:ph type="title"/>
           </p:nvPr>
         </p:nvSpPr>
-        <p:spPr/>
+        <p:spPr>
+          <a:xfrm>
+            <a:off x="1097280" y="964692"/>
+            <a:ext cx="9997440" cy="1188720"/>
+          </a:xfrm>
+        </p:spPr>
         <p:txBody>
           <a:bodyPr/>
           <a:lstStyle/>
@@ -11760,8 +11883,8 @@
         </p:blipFill>
         <p:spPr bwMode="auto">
           <a:xfrm>
-            <a:off x="2413000" y="3136900"/>
-            <a:ext cx="2590800" cy="2590800"/>
+            <a:off x="1955800" y="2921000"/>
+            <a:ext cx="3175000" cy="3175000"/>
           </a:xfrm>
           <a:prstGeom prst="rect">
             <a:avLst/>
@@ -11827,8 +11950,8 @@
         </p:blipFill>
         <p:spPr bwMode="auto">
           <a:xfrm>
-            <a:off x="7162800" y="3136900"/>
-            <a:ext cx="2590800" cy="2590800"/>
+            <a:off x="7048500" y="2921000"/>
+            <a:ext cx="3175000" cy="3175000"/>
           </a:xfrm>
           <a:prstGeom prst="rect">
             <a:avLst/>
@@ -11976,7 +12099,7 @@
             </a:pPr>
             <a:r>
               <a:rPr b="1"/>
-              <a:t>Quantitative · discrete as recorded</a:t>
+              <a:t>Quantitative · discrete</a:t>
             </a:r>
           </a:p>
         </p:txBody>
@@ -12436,7 +12559,7 @@
             </a:pPr>
             <a:r>
               <a:rPr b="1"/>
-              <a:t>Quantitative · discrete as recorded</a:t>
+              <a:t>Quantitative · discrete</a:t>
             </a:r>
           </a:p>
         </p:txBody>
@@ -12877,7 +13000,13 @@
       </p:sp>
       <p:sp>
         <p:nvSpPr>
-          <p:cNvPr id="1048" name="card-rail" descr=""/>
+          <p:cNvPr id="1048" name="card-rail" descr="">
+            <a:extLst>
+              <a:ext uri="{C183D7F6-B498-43B3-948B-1728B52AA6E4}">
+                <adec:decorative xmlns:adec="http://schemas.microsoft.com/office/drawing/2017/decorative" val="1"/>
+              </a:ext>
+            </a:extLst>
+          </p:cNvPr>
           <p:cNvSpPr/>
           <p:nvPr/>
         </p:nvSpPr>
@@ -12973,7 +13102,13 @@
       </p:sp>
       <p:sp>
         <p:nvSpPr>
-          <p:cNvPr id="1050" name="card-rail" descr=""/>
+          <p:cNvPr id="1050" name="card-rail" descr="">
+            <a:extLst>
+              <a:ext uri="{C183D7F6-B498-43B3-948B-1728B52AA6E4}">
+                <adec:decorative xmlns:adec="http://schemas.microsoft.com/office/drawing/2017/decorative" val="1"/>
+              </a:ext>
+            </a:extLst>
+          </p:cNvPr>
           <p:cNvSpPr/>
           <p:nvPr/>
         </p:nvSpPr>
@@ -13069,7 +13204,13 @@
       </p:sp>
       <p:sp>
         <p:nvSpPr>
-          <p:cNvPr id="1052" name="card-rail" descr=""/>
+          <p:cNvPr id="1052" name="card-rail" descr="">
+            <a:extLst>
+              <a:ext uri="{C183D7F6-B498-43B3-948B-1728B52AA6E4}">
+                <adec:decorative xmlns:adec="http://schemas.microsoft.com/office/drawing/2017/decorative" val="1"/>
+              </a:ext>
+            </a:extLst>
+          </p:cNvPr>
           <p:cNvSpPr/>
           <p:nvPr/>
         </p:nvSpPr>
@@ -13432,7 +13573,7 @@
             </a:pPr>
             <a:r>
               <a:rPr b="1"/>
-              <a:t>Use the workbook example</a:t>
+              <a:t>Use the worksheet example</a:t>
             </a:r>
           </a:p>
           <a:p>
@@ -13611,7 +13752,13 @@
       </p:sp>
       <p:sp>
         <p:nvSpPr>
-          <p:cNvPr id="1054" name="card-rail" descr=""/>
+          <p:cNvPr id="1054" name="card-rail" descr="">
+            <a:extLst>
+              <a:ext uri="{C183D7F6-B498-43B3-948B-1728B52AA6E4}">
+                <adec:decorative xmlns:adec="http://schemas.microsoft.com/office/drawing/2017/decorative" val="1"/>
+              </a:ext>
+            </a:extLst>
+          </p:cNvPr>
           <p:cNvSpPr/>
           <p:nvPr/>
         </p:nvSpPr>
@@ -13696,7 +13843,13 @@
       </p:sp>
       <p:sp>
         <p:nvSpPr>
-          <p:cNvPr id="1056" name="card-rail" descr=""/>
+          <p:cNvPr id="1056" name="card-rail" descr="">
+            <a:extLst>
+              <a:ext uri="{C183D7F6-B498-43B3-948B-1728B52AA6E4}">
+                <adec:decorative xmlns:adec="http://schemas.microsoft.com/office/drawing/2017/decorative" val="1"/>
+              </a:ext>
+            </a:extLst>
+          </p:cNvPr>
           <p:cNvSpPr/>
           <p:nvPr/>
         </p:nvSpPr>
@@ -13747,7 +13900,7 @@
           </a:ln>
         </p:spPr>
         <p:txBody>
-          <a:bodyPr lIns="182880" tIns="182880" rIns="182880" bIns="182880" anchor="t" wrap="square">
+          <a:bodyPr lIns="182880" tIns="0" rIns="182880" bIns="0" anchor="t" wrap="square">
             <a:normAutofit/>
           </a:bodyPr>
           <a:lstStyle/>
@@ -13786,7 +13939,7 @@
           </a:ln>
         </p:spPr>
         <p:txBody>
-          <a:bodyPr lIns="182880" tIns="182880" rIns="182880" bIns="182880" anchor="t" wrap="square">
+          <a:bodyPr lIns="182880" tIns="0" rIns="182880" bIns="0" anchor="t" wrap="square">
             <a:normAutofit/>
           </a:bodyPr>
           <a:lstStyle/>
@@ -13919,7 +14072,7 @@
             </a:pPr>
             <a:r>
               <a:rPr/>
-              <a:t>If quantitative, classify its recorded values as discrete or continuous.</a:t>
+              <a:t>If quantitative, classify the variable as discrete or continuous.</a:t>
             </a:r>
           </a:p>
         </p:txBody>
@@ -14032,7 +14185,13 @@
       </p:sp>
       <p:sp>
         <p:nvSpPr>
-          <p:cNvPr id="1060" name="box-rail" descr=""/>
+          <p:cNvPr id="1060" name="box-rail" descr="">
+            <a:extLst>
+              <a:ext uri="{C183D7F6-B498-43B3-948B-1728B52AA6E4}">
+                <adec:decorative xmlns:adec="http://schemas.microsoft.com/office/drawing/2017/decorative" val="1"/>
+              </a:ext>
+            </a:extLst>
+          </p:cNvPr>
           <p:cNvSpPr/>
           <p:nvPr/>
         </p:nvSpPr>
@@ -14169,7 +14328,13 @@
       </p:sp>
       <p:sp>
         <p:nvSpPr>
-          <p:cNvPr id="1062" name="card-rail" descr=""/>
+          <p:cNvPr id="1062" name="card-rail" descr="">
+            <a:extLst>
+              <a:ext uri="{C183D7F6-B498-43B3-948B-1728B52AA6E4}">
+                <adec:decorative xmlns:adec="http://schemas.microsoft.com/office/drawing/2017/decorative" val="1"/>
+              </a:ext>
+            </a:extLst>
+          </p:cNvPr>
           <p:cNvSpPr/>
           <p:nvPr/>
         </p:nvSpPr>
@@ -14254,7 +14419,13 @@
       </p:sp>
       <p:sp>
         <p:nvSpPr>
-          <p:cNvPr id="1064" name="card-rail" descr=""/>
+          <p:cNvPr id="1064" name="card-rail" descr="">
+            <a:extLst>
+              <a:ext uri="{C183D7F6-B498-43B3-948B-1728B52AA6E4}">
+                <adec:decorative xmlns:adec="http://schemas.microsoft.com/office/drawing/2017/decorative" val="1"/>
+              </a:ext>
+            </a:extLst>
+          </p:cNvPr>
           <p:cNvSpPr/>
           <p:nvPr/>
         </p:nvSpPr>
@@ -14357,7 +14528,7 @@
           </a:ln>
         </p:spPr>
         <p:txBody>
-          <a:bodyPr lIns="182880" tIns="182880" rIns="182880" bIns="182880" anchor="t" wrap="square">
+          <a:bodyPr lIns="182880" tIns="0" rIns="182880" bIns="0" anchor="t" wrap="square">
             <a:normAutofit/>
           </a:bodyPr>
           <a:lstStyle/>
@@ -14396,7 +14567,7 @@
           </a:ln>
         </p:spPr>
         <p:txBody>
-          <a:bodyPr lIns="182880" tIns="182880" rIns="182880" bIns="182880" anchor="t" wrap="square">
+          <a:bodyPr lIns="182880" tIns="0" rIns="182880" bIns="0" anchor="t" wrap="square">
             <a:normAutofit/>
           </a:bodyPr>
           <a:lstStyle/>
@@ -14469,7 +14640,13 @@
       </p:sp>
       <p:sp>
         <p:nvSpPr>
-          <p:cNvPr id="1068" name="card-rail" descr=""/>
+          <p:cNvPr id="1068" name="card-rail" descr="">
+            <a:extLst>
+              <a:ext uri="{C183D7F6-B498-43B3-948B-1728B52AA6E4}">
+                <adec:decorative xmlns:adec="http://schemas.microsoft.com/office/drawing/2017/decorative" val="1"/>
+              </a:ext>
+            </a:extLst>
+          </p:cNvPr>
           <p:cNvSpPr/>
           <p:nvPr/>
         </p:nvSpPr>
@@ -14500,14 +14677,14 @@
       </p:sp>
       <p:sp>
         <p:nvSpPr>
-          <p:cNvPr id="1069" name="card-steel" descr="card: 2 · Variables + types. Operationalize both variables and classify their recorded values."/>
+          <p:cNvPr id="1069" name="card-steel" descr="card: 2 · Variables + types. Operationalize both variables and classify each one."/>
           <p:cNvSpPr/>
           <p:nvPr/>
         </p:nvSpPr>
         <p:spPr>
           <a:xfrm>
             <a:off x="4477512" y="3840480"/>
-            <a:ext cx="3233928" cy="2255520"/>
+            <a:ext cx="3233928" cy="1950720"/>
           </a:xfrm>
           <a:prstGeom prst="roundRect">
             <a:avLst>
@@ -14547,21 +14724,27 @@
                   <a:srgbClr val="010B13"/>
                 </a:solidFill>
               </a:rPr>
-              <a:t>Operationalize both variables and classify their recorded values.</a:t>
-            </a:r>
-          </a:p>
-        </p:txBody>
-      </p:sp>
-      <p:sp>
-        <p:nvSpPr>
-          <p:cNvPr id="1070" name="card-rail" descr=""/>
+              <a:t>Operationalize both variables and classify each one.</a:t>
+            </a:r>
+          </a:p>
+        </p:txBody>
+      </p:sp>
+      <p:sp>
+        <p:nvSpPr>
+          <p:cNvPr id="1070" name="card-rail" descr="">
+            <a:extLst>
+              <a:ext uri="{C183D7F6-B498-43B3-948B-1728B52AA6E4}">
+                <adec:decorative xmlns:adec="http://schemas.microsoft.com/office/drawing/2017/decorative" val="1"/>
+              </a:ext>
+            </a:extLst>
+          </p:cNvPr>
           <p:cNvSpPr/>
           <p:nvPr/>
         </p:nvSpPr>
         <p:spPr>
           <a:xfrm>
             <a:off x="4477512" y="3840480"/>
-            <a:ext cx="54864" cy="2255520"/>
+            <a:ext cx="54864" cy="1950720"/>
           </a:xfrm>
           <a:prstGeom prst="roundRect">
             <a:avLst>
@@ -14639,7 +14822,13 @@
       </p:sp>
       <p:sp>
         <p:nvSpPr>
-          <p:cNvPr id="1072" name="card-rail" descr=""/>
+          <p:cNvPr id="1072" name="card-rail" descr="">
+            <a:extLst>
+              <a:ext uri="{C183D7F6-B498-43B3-948B-1728B52AA6E4}">
+                <adec:decorative xmlns:adec="http://schemas.microsoft.com/office/drawing/2017/decorative" val="1"/>
+              </a:ext>
+            </a:extLst>
+          </p:cNvPr>
           <p:cNvSpPr/>
           <p:nvPr/>
         </p:nvSpPr>
@@ -14871,7 +15060,7 @@
           </a:ln>
         </p:spPr>
         <p:txBody>
-          <a:bodyPr lIns="182880" tIns="182880" rIns="182880" bIns="182880" anchor="t" wrap="square">
+          <a:bodyPr lIns="182880" tIns="0" rIns="182880" bIns="0" anchor="t" wrap="square">
             <a:normAutofit/>
           </a:bodyPr>
           <a:lstStyle/>
@@ -14910,7 +15099,7 @@
           </a:ln>
         </p:spPr>
         <p:txBody>
-          <a:bodyPr lIns="182880" tIns="182880" rIns="182880" bIns="182880" anchor="t" wrap="square">
+          <a:bodyPr lIns="182880" tIns="0" rIns="182880" bIns="0" anchor="t" wrap="square">
             <a:normAutofit/>
           </a:bodyPr>
           <a:lstStyle/>
